--- a/Estudo roteiro AtivMob.pptx
+++ b/Estudo roteiro AtivMob.pptx
@@ -11,6 +11,7 @@
     <p:sldId id="279" r:id="rId5"/>
     <p:sldId id="281" r:id="rId6"/>
     <p:sldId id="282" r:id="rId7"/>
+    <p:sldId id="285" r:id="rId8"/>
   </p:sldIdLst>
   <p:sldSz cx="12192000" cy="6858000"/>
   <p:notesSz cx="6858000" cy="9144000"/>
@@ -264,7 +265,7 @@
           <a:p>
             <a:fld id="{6B4B2C77-BB0F-4875-9564-230EC276519E}" type="datetimeFigureOut">
               <a:rPr lang="pt-BR" smtClean="0"/>
-              <a:t>21/05/2025</a:t>
+              <a:t>22/05/2025</a:t>
             </a:fld>
             <a:endParaRPr lang="pt-BR"/>
           </a:p>
@@ -462,7 +463,7 @@
           <a:p>
             <a:fld id="{6B4B2C77-BB0F-4875-9564-230EC276519E}" type="datetimeFigureOut">
               <a:rPr lang="pt-BR" smtClean="0"/>
-              <a:t>21/05/2025</a:t>
+              <a:t>22/05/2025</a:t>
             </a:fld>
             <a:endParaRPr lang="pt-BR"/>
           </a:p>
@@ -670,7 +671,7 @@
           <a:p>
             <a:fld id="{6B4B2C77-BB0F-4875-9564-230EC276519E}" type="datetimeFigureOut">
               <a:rPr lang="pt-BR" smtClean="0"/>
-              <a:t>21/05/2025</a:t>
+              <a:t>22/05/2025</a:t>
             </a:fld>
             <a:endParaRPr lang="pt-BR"/>
           </a:p>
@@ -868,7 +869,7 @@
           <a:p>
             <a:fld id="{6B4B2C77-BB0F-4875-9564-230EC276519E}" type="datetimeFigureOut">
               <a:rPr lang="pt-BR" smtClean="0"/>
-              <a:t>21/05/2025</a:t>
+              <a:t>22/05/2025</a:t>
             </a:fld>
             <a:endParaRPr lang="pt-BR"/>
           </a:p>
@@ -1143,7 +1144,7 @@
           <a:p>
             <a:fld id="{6B4B2C77-BB0F-4875-9564-230EC276519E}" type="datetimeFigureOut">
               <a:rPr lang="pt-BR" smtClean="0"/>
-              <a:t>21/05/2025</a:t>
+              <a:t>22/05/2025</a:t>
             </a:fld>
             <a:endParaRPr lang="pt-BR"/>
           </a:p>
@@ -1408,7 +1409,7 @@
           <a:p>
             <a:fld id="{6B4B2C77-BB0F-4875-9564-230EC276519E}" type="datetimeFigureOut">
               <a:rPr lang="pt-BR" smtClean="0"/>
-              <a:t>21/05/2025</a:t>
+              <a:t>22/05/2025</a:t>
             </a:fld>
             <a:endParaRPr lang="pt-BR"/>
           </a:p>
@@ -1820,7 +1821,7 @@
           <a:p>
             <a:fld id="{6B4B2C77-BB0F-4875-9564-230EC276519E}" type="datetimeFigureOut">
               <a:rPr lang="pt-BR" smtClean="0"/>
-              <a:t>21/05/2025</a:t>
+              <a:t>22/05/2025</a:t>
             </a:fld>
             <a:endParaRPr lang="pt-BR"/>
           </a:p>
@@ -1961,7 +1962,7 @@
           <a:p>
             <a:fld id="{6B4B2C77-BB0F-4875-9564-230EC276519E}" type="datetimeFigureOut">
               <a:rPr lang="pt-BR" smtClean="0"/>
-              <a:t>21/05/2025</a:t>
+              <a:t>22/05/2025</a:t>
             </a:fld>
             <a:endParaRPr lang="pt-BR"/>
           </a:p>
@@ -2074,7 +2075,7 @@
           <a:p>
             <a:fld id="{6B4B2C77-BB0F-4875-9564-230EC276519E}" type="datetimeFigureOut">
               <a:rPr lang="pt-BR" smtClean="0"/>
-              <a:t>21/05/2025</a:t>
+              <a:t>22/05/2025</a:t>
             </a:fld>
             <a:endParaRPr lang="pt-BR"/>
           </a:p>
@@ -2385,7 +2386,7 @@
           <a:p>
             <a:fld id="{6B4B2C77-BB0F-4875-9564-230EC276519E}" type="datetimeFigureOut">
               <a:rPr lang="pt-BR" smtClean="0"/>
-              <a:t>21/05/2025</a:t>
+              <a:t>22/05/2025</a:t>
             </a:fld>
             <a:endParaRPr lang="pt-BR"/>
           </a:p>
@@ -2673,7 +2674,7 @@
           <a:p>
             <a:fld id="{6B4B2C77-BB0F-4875-9564-230EC276519E}" type="datetimeFigureOut">
               <a:rPr lang="pt-BR" smtClean="0"/>
-              <a:t>21/05/2025</a:t>
+              <a:t>22/05/2025</a:t>
             </a:fld>
             <a:endParaRPr lang="pt-BR"/>
           </a:p>
@@ -2914,7 +2915,7 @@
           <a:p>
             <a:fld id="{6B4B2C77-BB0F-4875-9564-230EC276519E}" type="datetimeFigureOut">
               <a:rPr lang="pt-BR" smtClean="0"/>
-              <a:t>21/05/2025</a:t>
+              <a:t>22/05/2025</a:t>
             </a:fld>
             <a:endParaRPr lang="pt-BR"/>
           </a:p>
@@ -4925,6 +4926,218 @@
 </p:sld>
 </file>
 
+<file path=ppt/slides/slide7.xml><?xml version="1.0" encoding="utf-8"?>
+<p:sld xmlns:a="http://schemas.openxmlformats.org/drawingml/2006/main" xmlns:r="http://schemas.openxmlformats.org/officeDocument/2006/relationships" xmlns:p="http://schemas.openxmlformats.org/presentationml/2006/main">
+  <p:cSld>
+    <p:spTree>
+      <p:nvGrpSpPr>
+        <p:cNvPr id="1" name="">
+          <a:extLst>
+            <a:ext uri="{FF2B5EF4-FFF2-40B4-BE49-F238E27FC236}">
+              <a16:creationId xmlns:a16="http://schemas.microsoft.com/office/drawing/2014/main" id="{ECB13D38-847E-6BCB-577B-D5A8580602D7}"/>
+            </a:ext>
+          </a:extLst>
+        </p:cNvPr>
+        <p:cNvGrpSpPr/>
+        <p:nvPr/>
+      </p:nvGrpSpPr>
+      <p:grpSpPr>
+        <a:xfrm>
+          <a:off x="0" y="0"/>
+          <a:ext cx="0" cy="0"/>
+          <a:chOff x="0" y="0"/>
+          <a:chExt cx="0" cy="0"/>
+        </a:xfrm>
+      </p:grpSpPr>
+      <p:pic>
+        <p:nvPicPr>
+          <p:cNvPr id="2" name="Imagem 1">
+            <a:extLst>
+              <a:ext uri="{FF2B5EF4-FFF2-40B4-BE49-F238E27FC236}">
+                <a16:creationId xmlns:a16="http://schemas.microsoft.com/office/drawing/2014/main" id="{25D52F52-A408-E54C-5675-2F91649AA1E0}"/>
+              </a:ext>
+            </a:extLst>
+          </p:cNvPr>
+          <p:cNvPicPr>
+            <a:picLocks noChangeAspect="1"/>
+          </p:cNvPicPr>
+          <p:nvPr/>
+        </p:nvPicPr>
+        <p:blipFill>
+          <a:blip r:embed="rId2"/>
+          <a:stretch>
+            <a:fillRect/>
+          </a:stretch>
+        </p:blipFill>
+        <p:spPr>
+          <a:xfrm>
+            <a:off x="-14335" y="0"/>
+            <a:ext cx="12192000" cy="6826112"/>
+          </a:xfrm>
+          <a:prstGeom prst="rect">
+            <a:avLst/>
+          </a:prstGeom>
+        </p:spPr>
+      </p:pic>
+      <p:sp>
+        <p:nvSpPr>
+          <p:cNvPr id="3" name="Google Shape;185;p30">
+            <a:extLst>
+              <a:ext uri="{FF2B5EF4-FFF2-40B4-BE49-F238E27FC236}">
+                <a16:creationId xmlns:a16="http://schemas.microsoft.com/office/drawing/2014/main" id="{A08CC82B-EB45-251E-3AC9-6A184CE725C7}"/>
+              </a:ext>
+            </a:extLst>
+          </p:cNvPr>
+          <p:cNvSpPr txBox="1">
+            <a:spLocks noGrp="1"/>
+          </p:cNvSpPr>
+          <p:nvPr>
+            <p:ph type="ctrTitle"/>
+          </p:nvPr>
+        </p:nvSpPr>
+        <p:spPr>
+          <a:xfrm>
+            <a:off x="109057" y="164757"/>
+            <a:ext cx="6979640" cy="590550"/>
+          </a:xfrm>
+          <a:prstGeom prst="rect">
+            <a:avLst/>
+          </a:prstGeom>
+        </p:spPr>
+        <p:txBody>
+          <a:bodyPr spcFirstLastPara="1" wrap="square" lIns="91425" tIns="91425" rIns="91425" bIns="91425" anchor="b" anchorCtr="0">
+            <a:noAutofit/>
+          </a:bodyPr>
+          <a:lstStyle/>
+          <a:p>
+            <a:pPr marL="0" lvl="0" indent="0" algn="l" rtl="0">
+              <a:spcBef>
+                <a:spcPts val="0"/>
+              </a:spcBef>
+              <a:spcAft>
+                <a:spcPts val="0"/>
+              </a:spcAft>
+              <a:buNone/>
+            </a:pPr>
+            <a:r>
+              <a:rPr lang="pt-BR" sz="1800" b="1" spc="600" dirty="0">
+                <a:solidFill>
+                  <a:srgbClr val="005DAA"/>
+                </a:solidFill>
+                <a:latin typeface="Montserrat" panose="00000500000000000000" pitchFamily="50" charset="0"/>
+                <a:ea typeface="+mn-ea"/>
+                <a:cs typeface="+mn-cs"/>
+              </a:rPr>
+              <a:t>Cenário 3</a:t>
+            </a:r>
+          </a:p>
+        </p:txBody>
+      </p:sp>
+      <p:sp>
+        <p:nvSpPr>
+          <p:cNvPr id="5" name="CaixaDeTexto 4">
+            <a:extLst>
+              <a:ext uri="{FF2B5EF4-FFF2-40B4-BE49-F238E27FC236}">
+                <a16:creationId xmlns:a16="http://schemas.microsoft.com/office/drawing/2014/main" id="{95713924-2775-0444-BA30-2BBB09510A5D}"/>
+              </a:ext>
+            </a:extLst>
+          </p:cNvPr>
+          <p:cNvSpPr txBox="1"/>
+          <p:nvPr/>
+        </p:nvSpPr>
+        <p:spPr>
+          <a:xfrm>
+            <a:off x="14335" y="919162"/>
+            <a:ext cx="9262830" cy="1029256"/>
+          </a:xfrm>
+          <a:prstGeom prst="rect">
+            <a:avLst/>
+          </a:prstGeom>
+          <a:noFill/>
+        </p:spPr>
+        <p:txBody>
+          <a:bodyPr wrap="square">
+            <a:spAutoFit/>
+          </a:bodyPr>
+          <a:lstStyle/>
+          <a:p>
+            <a:pPr>
+              <a:lnSpc>
+                <a:spcPct val="115000"/>
+              </a:lnSpc>
+              <a:spcAft>
+                <a:spcPts val="800"/>
+              </a:spcAft>
+            </a:pPr>
+            <a:r>
+              <a:rPr lang="pt-BR" b="1" dirty="0"/>
+              <a:t>Com a retirada de um promotor, as lojas foram redistribuídas com base na região geográfica e na quantidade atual de clientes por roteiro. Com isso, o promotor passaria a ser responsável por 10 lojas.</a:t>
+            </a:r>
+            <a:endParaRPr lang="pt-BR" sz="1800" b="1" kern="100" dirty="0">
+              <a:effectLst/>
+              <a:latin typeface="Calibri" panose="020F0502020204030204" pitchFamily="34" charset="0"/>
+              <a:ea typeface="Calibri" panose="020F0502020204030204" pitchFamily="34" charset="0"/>
+              <a:cs typeface="Times New Roman" panose="02020603050405020304" pitchFamily="18" charset="0"/>
+            </a:endParaRPr>
+          </a:p>
+        </p:txBody>
+      </p:sp>
+      <p:sp>
+        <p:nvSpPr>
+          <p:cNvPr id="6" name="CaixaDeTexto 5">
+            <a:extLst>
+              <a:ext uri="{FF2B5EF4-FFF2-40B4-BE49-F238E27FC236}">
+                <a16:creationId xmlns:a16="http://schemas.microsoft.com/office/drawing/2014/main" id="{07533A9B-7721-4F46-13DA-83A1AA1BB61A}"/>
+              </a:ext>
+            </a:extLst>
+          </p:cNvPr>
+          <p:cNvSpPr txBox="1"/>
+          <p:nvPr/>
+        </p:nvSpPr>
+        <p:spPr>
+          <a:xfrm>
+            <a:off x="14335" y="5210864"/>
+            <a:ext cx="5086906" cy="369332"/>
+          </a:xfrm>
+          <a:prstGeom prst="rect">
+            <a:avLst/>
+          </a:prstGeom>
+          <a:noFill/>
+        </p:spPr>
+        <p:txBody>
+          <a:bodyPr wrap="square" rtlCol="0">
+            <a:spAutoFit/>
+          </a:bodyPr>
+          <a:lstStyle/>
+          <a:p>
+            <a:r>
+              <a:rPr lang="pt-BR" dirty="0"/>
+              <a:t>🟣Natalia Oliveira 🟢</a:t>
+            </a:r>
+            <a:r>
+              <a:rPr lang="pt-BR" dirty="0" err="1"/>
+              <a:t>Henrque</a:t>
+            </a:r>
+            <a:r>
+              <a:rPr lang="pt-BR" dirty="0"/>
+              <a:t> Ponce</a:t>
+            </a:r>
+          </a:p>
+        </p:txBody>
+      </p:sp>
+    </p:spTree>
+    <p:extLst>
+      <p:ext uri="{BB962C8B-B14F-4D97-AF65-F5344CB8AC3E}">
+        <p14:creationId xmlns:p14="http://schemas.microsoft.com/office/powerpoint/2010/main" val="1564637982"/>
+      </p:ext>
+    </p:extLst>
+  </p:cSld>
+  <p:clrMapOvr>
+    <a:masterClrMapping/>
+  </p:clrMapOvr>
+</p:sld>
+</file>
+
 <file path=ppt/theme/theme1.xml><?xml version="1.0" encoding="utf-8"?>
 <a:theme xmlns:a="http://schemas.openxmlformats.org/drawingml/2006/main" name="Tema do Office">
   <a:themeElements>
